--- a/open-research-tools/simulations/simulations-slides.pptx
+++ b/open-research-tools/simulations/simulations-slides.pptx
@@ -12249,7 +12249,7 @@
             </a:r>
             <a:r>
               <a:rPr/>
-              <a:t> (CC-BY-SA 4.0 ). Code snippets are dedicated to the public domain and licensed under a </a:t>
+              <a:t> (CC-BY-SA 4.0). Code snippets are dedicated to the public domain and licensed under a </a:t>
             </a:r>
             <a:r>
               <a:rPr>
@@ -12272,7 +12272,7 @@
             </a:r>
             <a:r>
               <a:rPr i="1"/>
-              <a:t>Running simulations and power analysis in R</a:t>
+              <a:t>Introduction to simulations and power analysis in R</a:t>
             </a:r>
             <a:r>
               <a:rPr/>

--- a/open-research-tools/simulations/simulations-slides.pptx
+++ b/open-research-tools/simulations/simulations-slides.pptx
@@ -7209,7 +7209,7 @@
             </a:pPr>
             <a:r>
               <a:rPr/>
-              <a:t>30/09/2026</a:t>
+              <a:t>01/10/2026</a:t>
             </a:r>
           </a:p>
         </p:txBody>

--- a/open-research-tools/simulations/simulations-slides.pptx
+++ b/open-research-tools/simulations/simulations-slides.pptx
@@ -7209,7 +7209,7 @@
             </a:pPr>
             <a:r>
               <a:rPr/>
-              <a:t>01/10/2026</a:t>
+              <a:t>05/10/2026</a:t>
             </a:r>
           </a:p>
         </p:txBody>

--- a/open-research-tools/simulations/simulations-slides.pptx
+++ b/open-research-tools/simulations/simulations-slides.pptx
@@ -7209,7 +7209,7 @@
             </a:pPr>
             <a:r>
               <a:rPr/>
-              <a:t>05/10/2026</a:t>
+              <a:t>08/10/2026</a:t>
             </a:r>
           </a:p>
         </p:txBody>

--- a/open-research-tools/simulations/simulations-slides.pptx
+++ b/open-research-tools/simulations/simulations-slides.pptx
@@ -7209,7 +7209,7 @@
             </a:pPr>
             <a:r>
               <a:rPr/>
-              <a:t>08/10/2026</a:t>
+              <a:t>12/10/2026</a:t>
             </a:r>
           </a:p>
         </p:txBody>

--- a/open-research-tools/simulations/simulations-slides.pptx
+++ b/open-research-tools/simulations/simulations-slides.pptx
@@ -7209,7 +7209,7 @@
             </a:pPr>
             <a:r>
               <a:rPr/>
-              <a:t>12/10/2026</a:t>
+              <a:t>13/10/2026</a:t>
             </a:r>
           </a:p>
         </p:txBody>

--- a/open-research-tools/simulations/simulations-slides.pptx
+++ b/open-research-tools/simulations/simulations-slides.pptx
@@ -7209,7 +7209,7 @@
             </a:pPr>
             <a:r>
               <a:rPr/>
-              <a:t>13/10/2026</a:t>
+              <a:t>14/10/2026</a:t>
             </a:r>
           </a:p>
         </p:txBody>

--- a/open-research-tools/simulations/simulations-slides.pptx
+++ b/open-research-tools/simulations/simulations-slides.pptx
@@ -7209,7 +7209,7 @@
             </a:pPr>
             <a:r>
               <a:rPr/>
-              <a:t>14/10/2026</a:t>
+              <a:t>19/10/2026</a:t>
             </a:r>
           </a:p>
         </p:txBody>

--- a/open-research-tools/simulations/simulations-slides.pptx
+++ b/open-research-tools/simulations/simulations-slides.pptx
@@ -7209,7 +7209,7 @@
             </a:pPr>
             <a:r>
               <a:rPr/>
-              <a:t>19/10/2026</a:t>
+              <a:t>22/10/2026</a:t>
             </a:r>
           </a:p>
         </p:txBody>

--- a/open-research-tools/simulations/simulations-slides.pptx
+++ b/open-research-tools/simulations/simulations-slides.pptx
@@ -7209,7 +7209,7 @@
             </a:pPr>
             <a:r>
               <a:rPr/>
-              <a:t>22/10/2026</a:t>
+              <a:t>26/10/2026</a:t>
             </a:r>
           </a:p>
         </p:txBody>

--- a/open-research-tools/simulations/simulations-slides.pptx
+++ b/open-research-tools/simulations/simulations-slides.pptx
@@ -7209,7 +7209,7 @@
             </a:pPr>
             <a:r>
               <a:rPr/>
-              <a:t>26/10/2026</a:t>
+              <a:t>29/10/2026</a:t>
             </a:r>
           </a:p>
         </p:txBody>
